--- a/ClassMaterials/MapsAndObjectIntro/Slides/Part3-ObjectsAsArrayTypes.pptx
+++ b/ClassMaterials/MapsAndObjectIntro/Slides/Part3-ObjectsAsArrayTypes.pptx
@@ -320,22 +320,6 @@
             <ac:spMk id="8" creationId="{00000000-0000-0000-0000-000000000000}"/>
           </ac:spMkLst>
         </pc:spChg>
-      </pc:sldChg>
-    </pc:docChg>
-  </pc:docChgLst>
-  <pc:docChgLst>
-    <pc:chgData name="Lewandowski, Alec" userId="S::lewandaj@rose-hulman.edu::7c69e43b-7396-47b2-a000-e4b1fd9aa6ef" providerId="AD" clId="Web-{4449F7AC-1410-4252-986F-7997E84350D8}"/>
-    <pc:docChg chg="addSld delSld">
-      <pc:chgData name="Lewandowski, Alec" userId="S::lewandaj@rose-hulman.edu::7c69e43b-7396-47b2-a000-e4b1fd9aa6ef" providerId="AD" clId="Web-{4449F7AC-1410-4252-986F-7997E84350D8}" dt="2022-09-08T14:56:06.982" v="1"/>
-      <pc:docMkLst>
-        <pc:docMk/>
-      </pc:docMkLst>
-      <pc:sldChg chg="add del">
-        <pc:chgData name="Lewandowski, Alec" userId="S::lewandaj@rose-hulman.edu::7c69e43b-7396-47b2-a000-e4b1fd9aa6ef" providerId="AD" clId="Web-{4449F7AC-1410-4252-986F-7997E84350D8}" dt="2022-09-08T14:56:06.982" v="1"/>
-        <pc:sldMkLst>
-          <pc:docMk/>
-          <pc:sldMk cId="3615992630" sldId="319"/>
-        </pc:sldMkLst>
       </pc:sldChg>
     </pc:docChg>
   </pc:docChgLst>
@@ -773,6 +757,22 @@
     </pc:docChg>
   </pc:docChgLst>
   <pc:docChgLst>
+    <pc:chgData name="Lewandowski, Alec" userId="S::lewandaj@rose-hulman.edu::7c69e43b-7396-47b2-a000-e4b1fd9aa6ef" providerId="AD" clId="Web-{4449F7AC-1410-4252-986F-7997E84350D8}"/>
+    <pc:docChg chg="addSld delSld">
+      <pc:chgData name="Lewandowski, Alec" userId="S::lewandaj@rose-hulman.edu::7c69e43b-7396-47b2-a000-e4b1fd9aa6ef" providerId="AD" clId="Web-{4449F7AC-1410-4252-986F-7997E84350D8}" dt="2022-09-08T14:56:06.982" v="1"/>
+      <pc:docMkLst>
+        <pc:docMk/>
+      </pc:docMkLst>
+      <pc:sldChg chg="add del">
+        <pc:chgData name="Lewandowski, Alec" userId="S::lewandaj@rose-hulman.edu::7c69e43b-7396-47b2-a000-e4b1fd9aa6ef" providerId="AD" clId="Web-{4449F7AC-1410-4252-986F-7997E84350D8}" dt="2022-09-08T14:56:06.982" v="1"/>
+        <pc:sldMkLst>
+          <pc:docMk/>
+          <pc:sldMk cId="3615992630" sldId="319"/>
+        </pc:sldMkLst>
+      </pc:sldChg>
+    </pc:docChg>
+  </pc:docChgLst>
+  <pc:docChgLst>
     <pc:chgData name="Hollingsworth, Joseph" userId="6338ef61-550f-4a52-a8a3-bd9025908f10" providerId="ADAL" clId="{82C04DF7-5114-CF43-A7F9-40D6478D9412}"/>
     <pc:docChg chg="modSld">
       <pc:chgData name="Hollingsworth, Joseph" userId="6338ef61-550f-4a52-a8a3-bd9025908f10" providerId="ADAL" clId="{82C04DF7-5114-CF43-A7F9-40D6478D9412}" dt="2022-03-10T02:02:35.406" v="16" actId="6549"/>
@@ -916,7 +916,7 @@
               <a:pPr>
                 <a:defRPr/>
               </a:pPr>
-              <a:t>3/14/2025</a:t>
+              <a:t>9/11/2026</a:t>
             </a:fld>
             <a:endParaRPr lang="en-US"/>
           </a:p>
@@ -1209,7 +1209,7 @@
               <a:pPr>
                 <a:defRPr/>
               </a:pPr>
-              <a:t>3/14/2025</a:t>
+              <a:t>9/11/2026</a:t>
             </a:fld>
             <a:endParaRPr lang="en-US"/>
           </a:p>
@@ -2425,7 +2425,7 @@
               <a:pPr>
                 <a:defRPr/>
               </a:pPr>
-              <a:t>Friday, March 14, 2025</a:t>
+              <a:t>Friday, September 11, 2026</a:t>
             </a:fld>
             <a:endParaRPr lang="en-US"/>
           </a:p>
@@ -2608,7 +2608,7 @@
               <a:pPr>
                 <a:defRPr/>
               </a:pPr>
-              <a:t>Friday, March 14, 2025</a:t>
+              <a:t>Friday, September 11, 2026</a:t>
             </a:fld>
             <a:endParaRPr lang="en-US"/>
           </a:p>
@@ -2801,7 +2801,7 @@
               <a:pPr>
                 <a:defRPr/>
               </a:pPr>
-              <a:t>Friday, March 14, 2025</a:t>
+              <a:t>Friday, September 11, 2026</a:t>
             </a:fld>
             <a:endParaRPr lang="en-US"/>
           </a:p>
@@ -2984,7 +2984,7 @@
               <a:pPr>
                 <a:defRPr/>
               </a:pPr>
-              <a:t>Friday, March 14, 2025</a:t>
+              <a:t>Friday, September 11, 2026</a:t>
             </a:fld>
             <a:endParaRPr lang="en-US"/>
           </a:p>
@@ -3244,7 +3244,7 @@
               <a:pPr>
                 <a:defRPr/>
               </a:pPr>
-              <a:t>Friday, March 14, 2025</a:t>
+              <a:t>Friday, September 11, 2026</a:t>
             </a:fld>
             <a:endParaRPr lang="en-US"/>
           </a:p>
@@ -3544,7 +3544,7 @@
               <a:pPr>
                 <a:defRPr/>
               </a:pPr>
-              <a:t>Friday, March 14, 2025</a:t>
+              <a:t>Friday, September 11, 2026</a:t>
             </a:fld>
             <a:endParaRPr lang="en-US"/>
           </a:p>
@@ -3978,7 +3978,7 @@
               <a:pPr>
                 <a:defRPr/>
               </a:pPr>
-              <a:t>Friday, March 14, 2025</a:t>
+              <a:t>Friday, September 11, 2026</a:t>
             </a:fld>
             <a:endParaRPr lang="en-US"/>
           </a:p>
@@ -4110,7 +4110,7 @@
               <a:pPr>
                 <a:defRPr/>
               </a:pPr>
-              <a:t>Friday, March 14, 2025</a:t>
+              <a:t>Friday, September 11, 2026</a:t>
             </a:fld>
             <a:endParaRPr lang="en-US"/>
           </a:p>
@@ -4220,7 +4220,7 @@
               <a:pPr>
                 <a:defRPr/>
               </a:pPr>
-              <a:t>Friday, March 14, 2025</a:t>
+              <a:t>Friday, September 11, 2026</a:t>
             </a:fld>
             <a:endParaRPr lang="en-US"/>
           </a:p>
@@ -4510,7 +4510,7 @@
               <a:pPr>
                 <a:defRPr/>
               </a:pPr>
-              <a:t>Friday, March 14, 2025</a:t>
+              <a:t>Friday, September 11, 2026</a:t>
             </a:fld>
             <a:endParaRPr lang="en-US"/>
           </a:p>
@@ -4777,7 +4777,7 @@
               <a:pPr>
                 <a:defRPr/>
               </a:pPr>
-              <a:t>Friday, March 14, 2025</a:t>
+              <a:t>Friday, September 11, 2026</a:t>
             </a:fld>
             <a:endParaRPr lang="en-US"/>
           </a:p>
@@ -5003,7 +5003,7 @@
               <a:pPr>
                 <a:defRPr/>
               </a:pPr>
-              <a:t>Friday, March 14, 2025</a:t>
+              <a:t>Friday, September 11, 2026</a:t>
             </a:fld>
             <a:endParaRPr lang="en-US"/>
           </a:p>
@@ -5522,7 +5522,7 @@
           </a:ln>
           <a:extLst>
             <a:ext uri="{C572A759-6A51-4108-AA02-DFA0A04FC94B}">
-              <ma14:wrappingTextBoxFlag xmlns="" xmlns:ma14="http://schemas.microsoft.com/office/mac/drawingml/2011/main" val="1"/>
+              <ma14:wrappingTextBoxFlag xmlns:ma14="http://schemas.microsoft.com/office/mac/drawingml/2011/main" xmlns="" val="1"/>
             </a:ext>
           </a:extLst>
         </p:spPr>
@@ -19810,6 +19810,17 @@
 </file>
 
 <file path=customXml/item1.xml><?xml version="1.0" encoding="utf-8"?>
+<p:properties xmlns:p="http://schemas.microsoft.com/office/2006/metadata/properties" xmlns:xsi="http://www.w3.org/2001/XMLSchema-instance" xmlns:pc="http://schemas.microsoft.com/office/infopath/2007/PartnerControls">
+  <documentManagement>
+    <TaxCatchAll xmlns="820f9cb1-409d-4c4b-8197-1d4f7dd48124" xsi:nil="true"/>
+    <lcf76f155ced4ddcb4097134ff3c332f xmlns="08600313-7276-4ca7-b5d3-7d86193ee0ac">
+      <Terms xmlns="http://schemas.microsoft.com/office/infopath/2007/PartnerControls"/>
+    </lcf76f155ced4ddcb4097134ff3c332f>
+  </documentManagement>
+</p:properties>
+</file>
+
+<file path=customXml/item2.xml><?xml version="1.0" encoding="utf-8"?>
 <ct:contentTypeSchema xmlns:ct="http://schemas.microsoft.com/office/2006/metadata/contentType" xmlns:ma="http://schemas.microsoft.com/office/2006/metadata/properties/metaAttributes" ct:_="" ma:_="" ma:contentTypeName="Document" ma:contentTypeID="0x0101004285D81DBE5F5A448E892B34D6B8CF20" ma:contentTypeVersion="8" ma:contentTypeDescription="Create a new document." ma:contentTypeScope="" ma:versionID="ecce54155d2ea7caa9aed06c8b6b9867">
   <xsd:schema xmlns:xsd="http://www.w3.org/2001/XMLSchema" xmlns:xs="http://www.w3.org/2001/XMLSchema" xmlns:p="http://schemas.microsoft.com/office/2006/metadata/properties" xmlns:ns2="08600313-7276-4ca7-b5d3-7d86193ee0ac" xmlns:ns3="820f9cb1-409d-4c4b-8197-1d4f7dd48124" targetNamespace="http://schemas.microsoft.com/office/2006/metadata/properties" ma:root="true" ma:fieldsID="bfd7385540b70b2fe84ac888cc214377" ns2:_="" ns3:_="">
     <xsd:import namespace="08600313-7276-4ca7-b5d3-7d86193ee0ac"/>
@@ -19986,17 +19997,6 @@
 </ct:contentTypeSchema>
 </file>
 
-<file path=customXml/item2.xml><?xml version="1.0" encoding="utf-8"?>
-<p:properties xmlns:p="http://schemas.microsoft.com/office/2006/metadata/properties" xmlns:xsi="http://www.w3.org/2001/XMLSchema-instance" xmlns:pc="http://schemas.microsoft.com/office/infopath/2007/PartnerControls">
-  <documentManagement>
-    <TaxCatchAll xmlns="820f9cb1-409d-4c4b-8197-1d4f7dd48124" xsi:nil="true"/>
-    <lcf76f155ced4ddcb4097134ff3c332f xmlns="08600313-7276-4ca7-b5d3-7d86193ee0ac">
-      <Terms xmlns="http://schemas.microsoft.com/office/infopath/2007/PartnerControls"/>
-    </lcf76f155ced4ddcb4097134ff3c332f>
-  </documentManagement>
-</p:properties>
-</file>
-
 <file path=customXml/item3.xml><?xml version="1.0" encoding="utf-8"?>
 <?mso-contentType ?>
 <FormTemplates xmlns="http://schemas.microsoft.com/sharepoint/v3/contenttype/forms">
@@ -20007,6 +20007,24 @@
 </file>
 
 <file path=customXml/itemProps1.xml><?xml version="1.0" encoding="utf-8"?>
+<ds:datastoreItem xmlns:ds="http://schemas.openxmlformats.org/officeDocument/2006/customXml" ds:itemID="{B55853FB-FDB6-4767-A7D2-87B46BAC936B}">
+  <ds:schemaRefs>
+    <ds:schemaRef ds:uri="79ddb764-415a-4c38-83b7-908be6382bea"/>
+    <ds:schemaRef ds:uri="http://purl.org/dc/dcmitype/"/>
+    <ds:schemaRef ds:uri="http://purl.org/dc/elements/1.1/"/>
+    <ds:schemaRef ds:uri="http://purl.org/dc/terms/"/>
+    <ds:schemaRef ds:uri="http://schemas.microsoft.com/office/2006/documentManagement/types"/>
+    <ds:schemaRef ds:uri="http://schemas.microsoft.com/office/2006/metadata/properties"/>
+    <ds:schemaRef ds:uri="http://schemas.microsoft.com/office/infopath/2007/PartnerControls"/>
+    <ds:schemaRef ds:uri="http://schemas.openxmlformats.org/package/2006/metadata/core-properties"/>
+    <ds:schemaRef ds:uri="http://www.w3.org/XML/1998/namespace"/>
+    <ds:schemaRef ds:uri="820f9cb1-409d-4c4b-8197-1d4f7dd48124"/>
+    <ds:schemaRef ds:uri="08600313-7276-4ca7-b5d3-7d86193ee0ac"/>
+  </ds:schemaRefs>
+</ds:datastoreItem>
+</file>
+
+<file path=customXml/itemProps2.xml><?xml version="1.0" encoding="utf-8"?>
 <ds:datastoreItem xmlns:ds="http://schemas.openxmlformats.org/officeDocument/2006/customXml" ds:itemID="{506930A9-2269-4C50-A3CA-3568D9D5863C}">
   <ds:schemaRefs>
     <ds:schemaRef ds:uri="http://schemas.microsoft.com/office/2006/metadata/contentType"/>
@@ -20025,24 +20043,6 @@
 </ds:datastoreItem>
 </file>
 
-<file path=customXml/itemProps2.xml><?xml version="1.0" encoding="utf-8"?>
-<ds:datastoreItem xmlns:ds="http://schemas.openxmlformats.org/officeDocument/2006/customXml" ds:itemID="{B55853FB-FDB6-4767-A7D2-87B46BAC936B}">
-  <ds:schemaRefs>
-    <ds:schemaRef ds:uri="79ddb764-415a-4c38-83b7-908be6382bea"/>
-    <ds:schemaRef ds:uri="http://purl.org/dc/dcmitype/"/>
-    <ds:schemaRef ds:uri="http://purl.org/dc/elements/1.1/"/>
-    <ds:schemaRef ds:uri="http://purl.org/dc/terms/"/>
-    <ds:schemaRef ds:uri="http://schemas.microsoft.com/office/2006/documentManagement/types"/>
-    <ds:schemaRef ds:uri="http://schemas.microsoft.com/office/2006/metadata/properties"/>
-    <ds:schemaRef ds:uri="http://schemas.microsoft.com/office/infopath/2007/PartnerControls"/>
-    <ds:schemaRef ds:uri="http://schemas.openxmlformats.org/package/2006/metadata/core-properties"/>
-    <ds:schemaRef ds:uri="http://www.w3.org/XML/1998/namespace"/>
-    <ds:schemaRef ds:uri="820f9cb1-409d-4c4b-8197-1d4f7dd48124"/>
-    <ds:schemaRef ds:uri="08600313-7276-4ca7-b5d3-7d86193ee0ac"/>
-  </ds:schemaRefs>
-</ds:datastoreItem>
-</file>
-
 <file path=customXml/itemProps3.xml><?xml version="1.0" encoding="utf-8"?>
 <ds:datastoreItem xmlns:ds="http://schemas.openxmlformats.org/officeDocument/2006/customXml" ds:itemID="{29A08FB1-921F-4826-8B4B-8F80D137C2A8}">
   <ds:schemaRefs>
